--- a/docs/06-pitch/Three.py_1PagePitch.pptx
+++ b/docs/06-pitch/Three.py_1PagePitch.pptx
@@ -4348,7 +4348,7 @@
                 </a:solidFill>
                 <a:latin typeface="Tahoma"/>
               </a:rPr>
-              <a:t>Sapling ต่อยอดจากฟีเจอร์ ePocket ที่ K PLUS มีอยู่แล้ว ผ่านกลไก 3 ส่วนที่ทำงานร่วมกันโดยที่ผู้ใช้ไม่ต้องโยกเงินเอง</a:t>
+              <a:t>Sapling ต่อยอดจาก ePocket ที่ K PLUS มีอยู่แล้ว โดยจัดเงินเป็นกระเป๋า 3 ใบ คือ เงินรายเดือน ใช้จ่ายรายวัน และนิรภัย ผ่านกลไก 3 ส่วนที่ทำงานร่วมกันโดยผู้ใช้ไม่ต้องโยกเงินเอง</a:t>
             </a:r>
           </a:p>
         </p:txBody>
@@ -4480,7 +4480,7 @@
                 </a:solidFill>
                 <a:latin typeface="Tahoma"/>
               </a:rPr>
-              <a:t>เมื่อเงินเดือนเข้าบัญชี ระบบจะถามผู้ใช้ก่อนเสมอว่าต้องการแบ่งเงินตามแผนหรือไม่ แล้วจึงแบ่งเข้าบัญชีย่อยสามส่วน คือเงินกันไว้จ่ายบิล เงินออมในนิรภัย และเงินใช้จ่ายรายวัน หากตั้งให้จำผู้ส่ง รอบถัดไปจะทำงานอัตโนมัติทันที ใช้ได้ทั้งพนักงานประจำและฟรีแลนซ์ที่รายได้เข้าไม่ตรงงวด</a:t>
+              <a:t>เมื่อเงินเดือนเข้าบัญชี ระบบจะถามผู้ใช้ก่อนเสมอว่าต้องการแบ่งเงินตามแผนหรือไม่ แล้วกันเงินสำหรับบิลอัตโนมัติไว้ก่อน แบ่งส่วนออมเข้ากระเป๋านิรภัย และเก็บที่เหลือไว้ในบัญชีเงินรายเดือน หากตั้งให้จดจำผู้ส่ง รอบถัดไปจะทำงานอัตโนมัติทันที ใช้ได้ทั้งพนักงานประจำและฟรีแลนซ์ที่รายได้เข้าไม่ตรงงวด</a:t>
             </a:r>
           </a:p>
         </p:txBody>
@@ -4612,7 +4612,7 @@
                 </a:solidFill>
                 <a:latin typeface="Tahoma"/>
               </a:rPr>
-              <a:t>ทุกเที่ยงคืน ระบบจะเติมเงินในกระเป๋ารายวันให้ครบตามเป้าที่ตั้งไว้จากบัญชีเงินเดือน หากใช้เกินเป้าในวันนั้น ระบบจะไม่ปิดกั้นการใช้จ่าย แต่จะแจ้งเตือนพร้อมยอดคงเหลือให้เห็นทันที</a:t>
+              <a:t>ทุกเที่ยงคืน ระบบจะเติมกระเป๋าใช้จ่ายรายวันให้ครบตามเป้าที่ตั้งไว้ โดยดึงจากบัญชีเงินรายเดือน หากใช้เกินเป้าในวันนั้น ระบบจะไม่ปิดกั้นการใช้จ่าย แต่ดึงส่วนที่ขาดจากบัญชีเงินรายเดือนมาเติมให้ทันที พร้อมแจ้งเตือนยอดคงเหลือ</a:t>
             </a:r>
           </a:p>
         </p:txBody>

--- a/docs/06-pitch/Three.py_1PagePitch.pptx
+++ b/docs/06-pitch/Three.py_1PagePitch.pptx
@@ -3148,8 +3148,8 @@
         </p:nvSpPr>
         <p:spPr>
           <a:xfrm>
-            <a:off x="540000" y="198000"/>
-            <a:ext cx="3600000" cy="396000"/>
+            <a:off x="540000" y="125999"/>
+            <a:ext cx="3600000" cy="432000"/>
           </a:xfrm>
           <a:prstGeom prst="rect">
             <a:avLst/>
@@ -3171,7 +3171,7 @@
               </a:spcAft>
             </a:pPr>
             <a:r>
-              <a:rPr sz="3200" b="1">
+              <a:rPr sz="3000" b="1">
                 <a:solidFill>
                   <a:srgbClr val="FFFFFF"/>
                 </a:solidFill>
@@ -3190,8 +3190,8 @@
         </p:nvSpPr>
         <p:spPr>
           <a:xfrm>
-            <a:off x="540000" y="594000"/>
-            <a:ext cx="3960000" cy="576000"/>
+            <a:off x="540000" y="702000"/>
+            <a:ext cx="3960000" cy="503999"/>
           </a:xfrm>
           <a:prstGeom prst="rect">
             <a:avLst/>
@@ -3219,7 +3219,7 @@
                 </a:solidFill>
                 <a:latin typeface="Tahoma"/>
               </a:rPr>
-              <a:t>ระบบจัดสรรเงินอัตโนมัติบน K PLUS สำหรับ First Jobbers กันบิลไว้ก่อน แบ่งเงินอัตโนมัติ ออมแบบมีวินัย</a:t>
+              <a:t>ระบบบน K PLUS สำหรับ First Jobbers แบ่งเงินเดือนให้ใช้ได้ทีละวัน กันบิลไว้ก่อน ออมแบบมีวินัย</a:t>
             </a:r>
           </a:p>
         </p:txBody>
@@ -4348,33 +4348,75 @@
                 </a:solidFill>
                 <a:latin typeface="Tahoma"/>
               </a:rPr>
-              <a:t>Sapling ต่อยอดจาก ePocket ที่ K PLUS มีอยู่แล้ว โดยจัดเงินเป็นกระเป๋า 3 ใบ คือ เงินรายเดือน ใช้จ่ายรายวัน และนิรภัย ผ่านกลไก 3 ส่วนที่ทำงานร่วมกันโดยผู้ใช้ไม่ต้องโยกเงินเอง</a:t>
-            </a:r>
-          </a:p>
-        </p:txBody>
-      </p:sp>
-      <p:sp>
-        <p:nvSpPr>
-          <p:cNvPr id="30" name="Rounded Rectangle 29"/>
+              <a:t>หัวใจของ Sapling คือแบ่งเงินเดือนก้อนเดียวให้ใช้ได้ทีละวัน บน ePocket เดิมของ K PLUS ผ่านกระเป๋า 3 ใบ: เงินรายเดือน ใช้จ่ายรายวัน นิรภัย</a:t>
+            </a:r>
+          </a:p>
+        </p:txBody>
+      </p:sp>
+      <p:sp>
+        <p:nvSpPr>
+          <p:cNvPr id="30" name="TextBox 29"/>
+          <p:cNvSpPr txBox="1"/>
+          <p:nvPr/>
+        </p:nvSpPr>
+        <p:spPr>
+          <a:xfrm>
+            <a:off x="540000" y="3416400"/>
+            <a:ext cx="6480000" cy="144000"/>
+          </a:xfrm>
+          <a:prstGeom prst="rect">
+            <a:avLst/>
+          </a:prstGeom>
+          <a:noFill/>
+        </p:spPr>
+        <p:txBody>
+          <a:bodyPr wrap="square" anchor="t" lIns="0" rIns="0" tIns="0" bIns="0">
+            <a:spAutoFit/>
+          </a:bodyPr>
+          <a:lstStyle/>
+          <a:p>
+            <a:pPr algn="l">
+              <a:lnSpc>
+                <a:spcPct val="115000"/>
+              </a:lnSpc>
+              <a:spcAft>
+                <a:spcPts val="0"/>
+              </a:spcAft>
+            </a:pPr>
+            <a:r>
+              <a:rPr sz="800" b="0">
+                <a:solidFill>
+                  <a:srgbClr val="5A6A5F"/>
+                </a:solidFill>
+                <a:latin typeface="Tahoma"/>
+              </a:rPr>
+              <a:t>ตัวอย่างพนักงานเงินเดือน 22,500 บาท (ยังไม่นับเงินที่กันไว้จ่ายบิล)</a:t>
+            </a:r>
+          </a:p>
+        </p:txBody>
+      </p:sp>
+      <p:sp>
+        <p:nvSpPr>
+          <p:cNvPr id="31" name="Rounded Rectangle 30"/>
           <p:cNvSpPr/>
           <p:nvPr/>
         </p:nvSpPr>
         <p:spPr>
           <a:xfrm>
-            <a:off x="540000" y="3416400"/>
-            <a:ext cx="2088000" cy="1404000"/>
+            <a:off x="540000" y="3578400"/>
+            <a:ext cx="1485000" cy="450000"/>
           </a:xfrm>
           <a:prstGeom prst="roundRect">
             <a:avLst>
-              <a:gd name="adj" fmla="val 6000"/>
+              <a:gd name="adj" fmla="val 10000"/>
             </a:avLst>
           </a:prstGeom>
           <a:solidFill>
-            <a:srgbClr val="FAFCFB"/>
+            <a:srgbClr val="F2F8F5"/>
           </a:solidFill>
           <a:ln w="9525">
             <a:solidFill>
-              <a:srgbClr val="DCE8E1"/>
+              <a:srgbClr val="B9D8C7"/>
             </a:solidFill>
           </a:ln>
           <a:effectLst/>
@@ -4403,14 +4445,14 @@
       </p:sp>
       <p:sp>
         <p:nvSpPr>
-          <p:cNvPr id="31" name="TextBox 30"/>
+          <p:cNvPr id="32" name="TextBox 31"/>
           <p:cNvSpPr txBox="1"/>
           <p:nvPr/>
         </p:nvSpPr>
         <p:spPr>
           <a:xfrm>
-            <a:off x="630000" y="3488400"/>
-            <a:ext cx="1908000" cy="216000"/>
+            <a:off x="612000" y="3614400"/>
+            <a:ext cx="1341000" cy="162000"/>
           </a:xfrm>
           <a:prstGeom prst="rect">
             <a:avLst/>
@@ -4432,27 +4474,27 @@
               </a:spcAft>
             </a:pPr>
             <a:r>
-              <a:rPr sz="1050" b="1">
-                <a:solidFill>
-                  <a:srgbClr val="1B2420"/>
+              <a:rPr sz="919" b="1">
+                <a:solidFill>
+                  <a:srgbClr val="0B5C43"/>
                 </a:solidFill>
                 <a:latin typeface="Tahoma"/>
               </a:rPr>
-              <a:t>Auto-Split ตอนเงินเข้า</a:t>
-            </a:r>
-          </a:p>
-        </p:txBody>
-      </p:sp>
-      <p:sp>
-        <p:nvSpPr>
-          <p:cNvPr id="32" name="TextBox 31"/>
+              <a:t>เงินเดือนเข้า 22,500 ฿</a:t>
+            </a:r>
+          </a:p>
+        </p:txBody>
+      </p:sp>
+      <p:sp>
+        <p:nvSpPr>
+          <p:cNvPr id="33" name="TextBox 32"/>
           <p:cNvSpPr txBox="1"/>
           <p:nvPr/>
         </p:nvSpPr>
         <p:spPr>
           <a:xfrm>
-            <a:off x="630000" y="3686400"/>
-            <a:ext cx="1908000" cy="1044000"/>
+            <a:off x="612000" y="3758400"/>
+            <a:ext cx="1341000" cy="251999"/>
           </a:xfrm>
           <a:prstGeom prst="rect">
             <a:avLst/>
@@ -4467,46 +4509,88 @@
           <a:p>
             <a:pPr algn="l">
               <a:lnSpc>
-                <a:spcPct val="120000"/>
+                <a:spcPct val="110000"/>
               </a:lnSpc>
               <a:spcAft>
                 <a:spcPts val="0"/>
               </a:spcAft>
             </a:pPr>
             <a:r>
-              <a:rPr sz="860" b="0">
+              <a:rPr sz="760" b="0">
                 <a:solidFill>
                   <a:srgbClr val="33403A"/>
                 </a:solidFill>
                 <a:latin typeface="Tahoma"/>
               </a:rPr>
-              <a:t>เมื่อเงินเดือนเข้าบัญชี ระบบจะถามผู้ใช้ก่อนเสมอว่าต้องการแบ่งเงินตามแผนหรือไม่ แล้วกันเงินสำหรับบิลอัตโนมัติไว้ก่อน แบ่งส่วนออมเข้ากระเป๋านิรภัย และเก็บที่เหลือไว้ในบัญชีเงินรายเดือน หากตั้งให้จดจำผู้ส่ง รอบถัดไปจะทำงานอัตโนมัติทันที ใช้ได้ทั้งพนักงานประจำและฟรีแลนซ์ที่รายได้เข้าไม่ตรงงวด</a:t>
-            </a:r>
-          </a:p>
-        </p:txBody>
-      </p:sp>
-      <p:sp>
-        <p:nvSpPr>
-          <p:cNvPr id="33" name="Rounded Rectangle 32"/>
+              <a:t>ระบบถามยืนยันก่อนแบ่ง</a:t>
+            </a:r>
+          </a:p>
+        </p:txBody>
+      </p:sp>
+      <p:sp>
+        <p:nvSpPr>
+          <p:cNvPr id="34" name="TextBox 33"/>
+          <p:cNvSpPr txBox="1"/>
+          <p:nvPr/>
+        </p:nvSpPr>
+        <p:spPr>
+          <a:xfrm>
+            <a:off x="2025000" y="3704399"/>
+            <a:ext cx="180000" cy="180000"/>
+          </a:xfrm>
+          <a:prstGeom prst="rect">
+            <a:avLst/>
+          </a:prstGeom>
+          <a:noFill/>
+        </p:spPr>
+        <p:txBody>
+          <a:bodyPr wrap="square" anchor="t" lIns="0" rIns="0" tIns="0" bIns="0">
+            <a:spAutoFit/>
+          </a:bodyPr>
+          <a:lstStyle/>
+          <a:p>
+            <a:pPr algn="ctr">
+              <a:lnSpc>
+                <a:spcPct val="115000"/>
+              </a:lnSpc>
+              <a:spcAft>
+                <a:spcPts val="0"/>
+              </a:spcAft>
+            </a:pPr>
+            <a:r>
+              <a:rPr sz="1100" b="1">
+                <a:solidFill>
+                  <a:srgbClr val="0E7C5A"/>
+                </a:solidFill>
+                <a:latin typeface="Tahoma"/>
+              </a:rPr>
+              <a:t>→</a:t>
+            </a:r>
+          </a:p>
+        </p:txBody>
+      </p:sp>
+      <p:sp>
+        <p:nvSpPr>
+          <p:cNvPr id="35" name="Rounded Rectangle 34"/>
           <p:cNvSpPr/>
           <p:nvPr/>
         </p:nvSpPr>
         <p:spPr>
           <a:xfrm>
-            <a:off x="2736000" y="3416400"/>
-            <a:ext cx="2088000" cy="1404000"/>
+            <a:off x="2205000" y="3578400"/>
+            <a:ext cx="1485000" cy="450000"/>
           </a:xfrm>
           <a:prstGeom prst="roundRect">
             <a:avLst>
-              <a:gd name="adj" fmla="val 6000"/>
+              <a:gd name="adj" fmla="val 10000"/>
             </a:avLst>
           </a:prstGeom>
           <a:solidFill>
-            <a:srgbClr val="FAFCFB"/>
+            <a:srgbClr val="F2F8F5"/>
           </a:solidFill>
           <a:ln w="9525">
             <a:solidFill>
-              <a:srgbClr val="DCE8E1"/>
+              <a:srgbClr val="B9D8C7"/>
             </a:solidFill>
           </a:ln>
           <a:effectLst/>
@@ -4535,14 +4619,14 @@
       </p:sp>
       <p:sp>
         <p:nvSpPr>
-          <p:cNvPr id="34" name="TextBox 33"/>
+          <p:cNvPr id="36" name="TextBox 35"/>
           <p:cNvSpPr txBox="1"/>
           <p:nvPr/>
         </p:nvSpPr>
         <p:spPr>
           <a:xfrm>
-            <a:off x="2826000" y="3488400"/>
-            <a:ext cx="1908000" cy="216000"/>
+            <a:off x="2277000" y="3614400"/>
+            <a:ext cx="1341000" cy="162000"/>
           </a:xfrm>
           <a:prstGeom prst="rect">
             <a:avLst/>
@@ -4564,27 +4648,27 @@
               </a:spcAft>
             </a:pPr>
             <a:r>
-              <a:rPr sz="1050" b="1">
-                <a:solidFill>
-                  <a:srgbClr val="1B2420"/>
+              <a:rPr sz="919" b="1">
+                <a:solidFill>
+                  <a:srgbClr val="0B5C43"/>
                 </a:solidFill>
                 <a:latin typeface="Tahoma"/>
               </a:rPr>
-              <a:t>Daily Auto-Refill</a:t>
-            </a:r>
-          </a:p>
-        </p:txBody>
-      </p:sp>
-      <p:sp>
-        <p:nvSpPr>
-          <p:cNvPr id="35" name="TextBox 34"/>
+              <a:t>นิรภัย 4,500 ฿</a:t>
+            </a:r>
+          </a:p>
+        </p:txBody>
+      </p:sp>
+      <p:sp>
+        <p:nvSpPr>
+          <p:cNvPr id="37" name="TextBox 36"/>
           <p:cNvSpPr txBox="1"/>
           <p:nvPr/>
         </p:nvSpPr>
         <p:spPr>
           <a:xfrm>
-            <a:off x="2826000" y="3686400"/>
-            <a:ext cx="1908000" cy="1044000"/>
+            <a:off x="2277000" y="3758400"/>
+            <a:ext cx="1341000" cy="251999"/>
           </a:xfrm>
           <a:prstGeom prst="rect">
             <a:avLst/>
@@ -4599,46 +4683,88 @@
           <a:p>
             <a:pPr algn="l">
               <a:lnSpc>
-                <a:spcPct val="120000"/>
+                <a:spcPct val="110000"/>
               </a:lnSpc>
               <a:spcAft>
                 <a:spcPts val="0"/>
               </a:spcAft>
             </a:pPr>
             <a:r>
-              <a:rPr sz="860" b="0">
+              <a:rPr sz="760" b="0">
                 <a:solidFill>
                   <a:srgbClr val="33403A"/>
                 </a:solidFill>
                 <a:latin typeface="Tahoma"/>
               </a:rPr>
-              <a:t>ทุกเที่ยงคืน ระบบจะเติมกระเป๋าใช้จ่ายรายวันให้ครบตามเป้าที่ตั้งไว้ โดยดึงจากบัญชีเงินรายเดือน หากใช้เกินเป้าในวันนั้น ระบบจะไม่ปิดกั้นการใช้จ่าย แต่ดึงส่วนที่ขาดจากบัญชีเงินรายเดือนมาเติมให้ทันที พร้อมแจ้งเตือนยอดคงเหลือ</a:t>
-            </a:r>
-          </a:p>
-        </p:txBody>
-      </p:sp>
-      <p:sp>
-        <p:nvSpPr>
-          <p:cNvPr id="36" name="Rounded Rectangle 35"/>
+              <a:t>บัญชีเงินรายเดือน 18,000 ฿</a:t>
+            </a:r>
+          </a:p>
+        </p:txBody>
+      </p:sp>
+      <p:sp>
+        <p:nvSpPr>
+          <p:cNvPr id="38" name="TextBox 37"/>
+          <p:cNvSpPr txBox="1"/>
+          <p:nvPr/>
+        </p:nvSpPr>
+        <p:spPr>
+          <a:xfrm>
+            <a:off x="3690000" y="3704399"/>
+            <a:ext cx="180000" cy="180000"/>
+          </a:xfrm>
+          <a:prstGeom prst="rect">
+            <a:avLst/>
+          </a:prstGeom>
+          <a:noFill/>
+        </p:spPr>
+        <p:txBody>
+          <a:bodyPr wrap="square" anchor="t" lIns="0" rIns="0" tIns="0" bIns="0">
+            <a:spAutoFit/>
+          </a:bodyPr>
+          <a:lstStyle/>
+          <a:p>
+            <a:pPr algn="ctr">
+              <a:lnSpc>
+                <a:spcPct val="115000"/>
+              </a:lnSpc>
+              <a:spcAft>
+                <a:spcPts val="0"/>
+              </a:spcAft>
+            </a:pPr>
+            <a:r>
+              <a:rPr sz="1100" b="1">
+                <a:solidFill>
+                  <a:srgbClr val="0E7C5A"/>
+                </a:solidFill>
+                <a:latin typeface="Tahoma"/>
+              </a:rPr>
+              <a:t>→</a:t>
+            </a:r>
+          </a:p>
+        </p:txBody>
+      </p:sp>
+      <p:sp>
+        <p:nvSpPr>
+          <p:cNvPr id="39" name="Rounded Rectangle 38"/>
           <p:cNvSpPr/>
           <p:nvPr/>
         </p:nvSpPr>
         <p:spPr>
           <a:xfrm>
-            <a:off x="4932000" y="3416400"/>
-            <a:ext cx="2088000" cy="1404000"/>
+            <a:off x="3870000" y="3578400"/>
+            <a:ext cx="1485000" cy="450000"/>
           </a:xfrm>
           <a:prstGeom prst="roundRect">
             <a:avLst>
-              <a:gd name="adj" fmla="val 6000"/>
+              <a:gd name="adj" fmla="val 10000"/>
             </a:avLst>
           </a:prstGeom>
           <a:solidFill>
-            <a:srgbClr val="FAFCFB"/>
+            <a:srgbClr val="F2F8F5"/>
           </a:solidFill>
           <a:ln w="9525">
             <a:solidFill>
-              <a:srgbClr val="DCE8E1"/>
+              <a:srgbClr val="B9D8C7"/>
             </a:solidFill>
           </a:ln>
           <a:effectLst/>
@@ -4667,14 +4793,14 @@
       </p:sp>
       <p:sp>
         <p:nvSpPr>
-          <p:cNvPr id="37" name="TextBox 36"/>
+          <p:cNvPr id="40" name="TextBox 39"/>
           <p:cNvSpPr txBox="1"/>
           <p:nvPr/>
         </p:nvSpPr>
         <p:spPr>
           <a:xfrm>
-            <a:off x="5022000" y="3488400"/>
-            <a:ext cx="1908000" cy="216000"/>
+            <a:off x="3942000" y="3614400"/>
+            <a:ext cx="1341000" cy="162000"/>
           </a:xfrm>
           <a:prstGeom prst="rect">
             <a:avLst/>
@@ -4696,27 +4822,27 @@
               </a:spcAft>
             </a:pPr>
             <a:r>
-              <a:rPr sz="1050" b="1">
-                <a:solidFill>
-                  <a:srgbClr val="1B2420"/>
+              <a:rPr sz="919" b="1">
+                <a:solidFill>
+                  <a:srgbClr val="0B5C43"/>
                 </a:solidFill>
                 <a:latin typeface="Tahoma"/>
               </a:rPr>
-              <a:t>กระเป๋านิรภัย (Vault)</a:t>
-            </a:r>
-          </a:p>
-        </p:txBody>
-      </p:sp>
-      <p:sp>
-        <p:nvSpPr>
-          <p:cNvPr id="38" name="TextBox 37"/>
+              <a:t>เป้ารายวัน 600 ฿</a:t>
+            </a:r>
+          </a:p>
+        </p:txBody>
+      </p:sp>
+      <p:sp>
+        <p:nvSpPr>
+          <p:cNvPr id="41" name="TextBox 40"/>
           <p:cNvSpPr txBox="1"/>
           <p:nvPr/>
         </p:nvSpPr>
         <p:spPr>
           <a:xfrm>
-            <a:off x="5022000" y="3686400"/>
-            <a:ext cx="1908000" cy="1044000"/>
+            <a:off x="3942000" y="3758400"/>
+            <a:ext cx="1341000" cy="251999"/>
           </a:xfrm>
           <a:prstGeom prst="rect">
             <a:avLst/>
@@ -4731,38 +4857,80 @@
           <a:p>
             <a:pPr algn="l">
               <a:lnSpc>
-                <a:spcPct val="120000"/>
+                <a:spcPct val="110000"/>
               </a:lnSpc>
               <a:spcAft>
                 <a:spcPts val="0"/>
               </a:spcAft>
             </a:pPr>
             <a:r>
-              <a:rPr sz="860" b="0">
+              <a:rPr sz="760" b="0">
                 <a:solidFill>
                   <a:srgbClr val="33403A"/>
                 </a:solidFill>
                 <a:latin typeface="Tahoma"/>
               </a:rPr>
-              <a:t>เงินในกระเป๋านี้จะถอนออกไม่ได้ทันที ต้องรอผ่านช่วงเวลาที่กำหนดไว้ก่อน แล้วระบบจะปล่อยเงินให้อัตโนมัติ แนวคิดนี้อ้างอิงจากงานวิจัยด้าน commitment device (Ashraf, Karlan &amp; Yin, QJE 2006) ที่ยืนยันว่าผู้ใช้ยอมรับกลไกลักษณะนี้ได้จริงแม้ไม่มีผลตอบแทนพิเศษ</a:t>
-            </a:r>
-          </a:p>
-        </p:txBody>
-      </p:sp>
-      <p:sp>
-        <p:nvSpPr>
-          <p:cNvPr id="39" name="Rounded Rectangle 38"/>
+              <a:t>18,000 ÷ 30 วัน ผู้ใช้กดรับหรือแก้เองได้</a:t>
+            </a:r>
+          </a:p>
+        </p:txBody>
+      </p:sp>
+      <p:sp>
+        <p:nvSpPr>
+          <p:cNvPr id="42" name="TextBox 41"/>
+          <p:cNvSpPr txBox="1"/>
+          <p:nvPr/>
+        </p:nvSpPr>
+        <p:spPr>
+          <a:xfrm>
+            <a:off x="5355000" y="3704399"/>
+            <a:ext cx="180000" cy="180000"/>
+          </a:xfrm>
+          <a:prstGeom prst="rect">
+            <a:avLst/>
+          </a:prstGeom>
+          <a:noFill/>
+        </p:spPr>
+        <p:txBody>
+          <a:bodyPr wrap="square" anchor="t" lIns="0" rIns="0" tIns="0" bIns="0">
+            <a:spAutoFit/>
+          </a:bodyPr>
+          <a:lstStyle/>
+          <a:p>
+            <a:pPr algn="ctr">
+              <a:lnSpc>
+                <a:spcPct val="115000"/>
+              </a:lnSpc>
+              <a:spcAft>
+                <a:spcPts val="0"/>
+              </a:spcAft>
+            </a:pPr>
+            <a:r>
+              <a:rPr sz="1100" b="1">
+                <a:solidFill>
+                  <a:srgbClr val="0E7C5A"/>
+                </a:solidFill>
+                <a:latin typeface="Tahoma"/>
+              </a:rPr>
+              <a:t>→</a:t>
+            </a:r>
+          </a:p>
+        </p:txBody>
+      </p:sp>
+      <p:sp>
+        <p:nvSpPr>
+          <p:cNvPr id="43" name="Rounded Rectangle 42"/>
           <p:cNvSpPr/>
           <p:nvPr/>
         </p:nvSpPr>
         <p:spPr>
           <a:xfrm>
-            <a:off x="540000" y="4910400"/>
-            <a:ext cx="6480000" cy="468000"/>
+            <a:off x="5535000" y="3578400"/>
+            <a:ext cx="1485000" cy="450000"/>
           </a:xfrm>
           <a:prstGeom prst="roundRect">
             <a:avLst>
-              <a:gd name="adj" fmla="val 12000"/>
+              <a:gd name="adj" fmla="val 10000"/>
             </a:avLst>
           </a:prstGeom>
           <a:solidFill>
@@ -4772,7 +4940,6 @@
             <a:solidFill>
               <a:srgbClr val="B9D8C7"/>
             </a:solidFill>
-            <a:prstDash val="dash"/>
           </a:ln>
           <a:effectLst/>
         </p:spPr>
@@ -4800,65 +4967,14 @@
       </p:sp>
       <p:sp>
         <p:nvSpPr>
-          <p:cNvPr id="40" name="TextBox 39"/>
+          <p:cNvPr id="44" name="TextBox 43"/>
           <p:cNvSpPr txBox="1"/>
           <p:nvPr/>
         </p:nvSpPr>
         <p:spPr>
           <a:xfrm>
-            <a:off x="648000" y="4964400"/>
-            <a:ext cx="6264000" cy="360000"/>
-          </a:xfrm>
-          <a:prstGeom prst="rect">
-            <a:avLst/>
-          </a:prstGeom>
-          <a:noFill/>
-        </p:spPr>
-        <p:txBody>
-          <a:bodyPr wrap="square" anchor="t" lIns="0" rIns="0" tIns="0" bIns="0">
-            <a:spAutoFit/>
-          </a:bodyPr>
-          <a:lstStyle/>
-          <a:p>
-            <a:pPr algn="l">
-              <a:lnSpc>
-                <a:spcPct val="120000"/>
-              </a:lnSpc>
-              <a:spcAft>
-                <a:spcPts val="0"/>
-              </a:spcAft>
-            </a:pPr>
-            <a:r>
-              <a:rPr sz="860" b="1">
-                <a:solidFill>
-                  <a:srgbClr val="0B5C43"/>
-                </a:solidFill>
-                <a:latin typeface="Tahoma"/>
-              </a:rPr>
-              <a:t>จุดเล็กๆ ที่ใส่ใจ: </a:t>
-            </a:r>
-            <a:r>
-              <a:rPr sz="860" b="0">
-                <a:solidFill>
-                  <a:srgbClr val="33403A"/>
-                </a:solidFill>
-                <a:latin typeface="Tahoma"/>
-              </a:rPr>
-              <a:t>หน้าจอกระเป๋านิรภัยมีต้นไม้ที่โตขึ้นเป็นระยะตามจำนวนรอบที่ออมต่อเนื่อง ไม่ใช่ยอดเงิน คนเงินเดือนน้อยจึงโตได้เท่าคนเงินเดือนมาก และถอนเงินก็ไม่ทำให้ต้นไม้ตาย เป็นแรงจูงใจง่ายๆ ให้อยากกลับมาออมสม่ำเสมอ</a:t>
-            </a:r>
-          </a:p>
-        </p:txBody>
-      </p:sp>
-      <p:sp>
-        <p:nvSpPr>
-          <p:cNvPr id="41" name="TextBox 40"/>
-          <p:cNvSpPr txBox="1"/>
-          <p:nvPr/>
-        </p:nvSpPr>
-        <p:spPr>
-          <a:xfrm>
-            <a:off x="540000" y="5522400"/>
-            <a:ext cx="3150000" cy="251999"/>
+            <a:off x="5607000" y="3614400"/>
+            <a:ext cx="1341000" cy="162000"/>
           </a:xfrm>
           <a:prstGeom prst="rect">
             <a:avLst/>
@@ -4880,27 +4996,27 @@
               </a:spcAft>
             </a:pPr>
             <a:r>
-              <a:rPr sz="1500" b="1">
+              <a:rPr sz="919" b="1">
                 <a:solidFill>
                   <a:srgbClr val="0B5C43"/>
                 </a:solidFill>
                 <a:latin typeface="Tahoma"/>
               </a:rPr>
-              <a:t>Target Users</a:t>
-            </a:r>
-          </a:p>
-        </p:txBody>
-      </p:sp>
-      <p:sp>
-        <p:nvSpPr>
-          <p:cNvPr id="42" name="TextBox 41"/>
+              <a:t>เติมทุกเที่ยงคืน</a:t>
+            </a:r>
+          </a:p>
+        </p:txBody>
+      </p:sp>
+      <p:sp>
+        <p:nvSpPr>
+          <p:cNvPr id="45" name="TextBox 44"/>
           <p:cNvSpPr txBox="1"/>
           <p:nvPr/>
         </p:nvSpPr>
         <p:spPr>
           <a:xfrm>
-            <a:off x="540000" y="5745600"/>
-            <a:ext cx="3150000" cy="1440000"/>
+            <a:off x="5607000" y="3758400"/>
+            <a:ext cx="1341000" cy="251999"/>
           </a:xfrm>
           <a:prstGeom prst="rect">
             <a:avLst/>
@@ -4915,255 +5031,47 @@
           <a:p>
             <a:pPr algn="l">
               <a:lnSpc>
-                <a:spcPct val="128000"/>
+                <a:spcPct val="110000"/>
               </a:lnSpc>
               <a:spcAft>
                 <a:spcPts val="0"/>
               </a:spcAft>
             </a:pPr>
             <a:r>
-              <a:rPr sz="930" b="0">
-                <a:solidFill>
-                  <a:srgbClr val="1B2420"/>
+              <a:rPr sz="760" b="0">
+                <a:solidFill>
+                  <a:srgbClr val="33403A"/>
                 </a:solidFill>
                 <a:latin typeface="Tahoma"/>
               </a:rPr>
-              <a:t>ผู้ใช้ K PLUS อายุ 22–30 ปี กลุ่ม First Jobbers ที่รายได้ปานกลางถึงจำกัด เช่น พนักงานออฟฟิศเงินเดือน 22,500 บาทที่เข้าตรงเวลาทุกเดือน หรือฟรีแลนซ์ที่ลูกค้าโอนเงินไม่ตรงงวด คนกลุ่มนี้มีรายรับแต่จัดสรรเงินเองไม่ทัน โดยเฉพาะกลุ่มที่เช่าบ้านหรือคอนโดในเมืองซึ่งค่าครองชีพสูงเมื่อเทียบกับรายได้</a:t>
-            </a:r>
-          </a:p>
-        </p:txBody>
-      </p:sp>
-      <p:sp>
-        <p:nvSpPr>
-          <p:cNvPr id="43" name="TextBox 42"/>
-          <p:cNvSpPr txBox="1"/>
-          <p:nvPr/>
-        </p:nvSpPr>
-        <p:spPr>
-          <a:xfrm>
-            <a:off x="3870000" y="5522400"/>
-            <a:ext cx="3150000" cy="251999"/>
-          </a:xfrm>
-          <a:prstGeom prst="rect">
-            <a:avLst/>
-          </a:prstGeom>
-          <a:noFill/>
-        </p:spPr>
-        <p:txBody>
-          <a:bodyPr wrap="square" anchor="t" lIns="0" rIns="0" tIns="0" bIns="0">
-            <a:spAutoFit/>
-          </a:bodyPr>
-          <a:lstStyle/>
-          <a:p>
-            <a:pPr algn="l">
-              <a:lnSpc>
-                <a:spcPct val="115000"/>
-              </a:lnSpc>
-              <a:spcAft>
-                <a:spcPts val="0"/>
-              </a:spcAft>
-            </a:pPr>
-            <a:r>
-              <a:rPr sz="1500" b="1">
-                <a:solidFill>
-                  <a:srgbClr val="0B5C43"/>
-                </a:solidFill>
-                <a:latin typeface="Tahoma"/>
-              </a:rPr>
-              <a:t>Track Perspective — Track 1</a:t>
-            </a:r>
-          </a:p>
-        </p:txBody>
-      </p:sp>
-      <p:sp>
-        <p:nvSpPr>
-          <p:cNvPr id="44" name="TextBox 43"/>
-          <p:cNvSpPr txBox="1"/>
-          <p:nvPr/>
-        </p:nvSpPr>
-        <p:spPr>
-          <a:xfrm>
-            <a:off x="3870000" y="5745600"/>
-            <a:ext cx="3150000" cy="540000"/>
-          </a:xfrm>
-          <a:prstGeom prst="rect">
-            <a:avLst/>
-          </a:prstGeom>
-          <a:noFill/>
-        </p:spPr>
-        <p:txBody>
-          <a:bodyPr wrap="square" anchor="t" lIns="0" rIns="0" tIns="0" bIns="0">
-            <a:spAutoFit/>
-          </a:bodyPr>
-          <a:lstStyle/>
-          <a:p>
-            <a:pPr algn="l">
-              <a:lnSpc>
-                <a:spcPct val="122000"/>
-              </a:lnSpc>
-              <a:spcAft>
-                <a:spcPts val="0"/>
-              </a:spcAft>
-            </a:pPr>
-            <a:r>
-              <a:rPr sz="930" b="0">
-                <a:solidFill>
-                  <a:srgbClr val="1B2420"/>
-                </a:solidFill>
-                <a:latin typeface="Tahoma"/>
-              </a:rPr>
-              <a:t>ด้านการพัฒนา ออกแบบ rule engine แยกเป็นโมดูลที่ทดสอบง่าย ให้สถานะรอถอนเงินอ้างอิงจากเซิร์ฟเวอร์เท่านั้น และบันทึกทุกรายการผ่าน ledger ที่เขียนทางเดียวเพื่อกันข้อมูลผิดเพี้ยน</a:t>
-            </a:r>
-          </a:p>
-        </p:txBody>
-      </p:sp>
-      <p:sp>
-        <p:nvSpPr>
-          <p:cNvPr id="45" name="TextBox 44"/>
-          <p:cNvSpPr txBox="1"/>
-          <p:nvPr/>
-        </p:nvSpPr>
-        <p:spPr>
-          <a:xfrm>
-            <a:off x="3870000" y="6256800"/>
-            <a:ext cx="3150000" cy="540000"/>
-          </a:xfrm>
-          <a:prstGeom prst="rect">
-            <a:avLst/>
-          </a:prstGeom>
-          <a:noFill/>
-        </p:spPr>
-        <p:txBody>
-          <a:bodyPr wrap="square" anchor="t" lIns="0" rIns="0" tIns="0" bIns="0">
-            <a:spAutoFit/>
-          </a:bodyPr>
-          <a:lstStyle/>
-          <a:p>
-            <a:pPr algn="l">
-              <a:lnSpc>
-                <a:spcPct val="122000"/>
-              </a:lnSpc>
-              <a:spcAft>
-                <a:spcPts val="0"/>
-              </a:spcAft>
-            </a:pPr>
-            <a:r>
-              <a:rPr sz="930" b="0">
-                <a:solidFill>
-                  <a:srgbClr val="1B2420"/>
-                </a:solidFill>
-                <a:latin typeface="Tahoma"/>
-              </a:rPr>
-              <a:t>ด้านการทดสอบ ใช้ property test สุ่มธุรกรรมกว่าหมื่นรายการยืนยันว่ายอดเงินทุกบัญชีถูกต้องเสมอ ร่วมกับ unit และ integration test ครอบคลุมกรณีย่อยกว่า 50 จุด และทดสอบ idempotency กับ concurrency โดยเฉพาะ</a:t>
-            </a:r>
-          </a:p>
-        </p:txBody>
-      </p:sp>
-      <p:sp>
-        <p:nvSpPr>
-          <p:cNvPr id="46" name="TextBox 45"/>
-          <p:cNvSpPr txBox="1"/>
-          <p:nvPr/>
-        </p:nvSpPr>
-        <p:spPr>
-          <a:xfrm>
-            <a:off x="3870000" y="6768000"/>
-            <a:ext cx="3150000" cy="540000"/>
-          </a:xfrm>
-          <a:prstGeom prst="rect">
-            <a:avLst/>
-          </a:prstGeom>
-          <a:noFill/>
-        </p:spPr>
-        <p:txBody>
-          <a:bodyPr wrap="square" anchor="t" lIns="0" rIns="0" tIns="0" bIns="0">
-            <a:spAutoFit/>
-          </a:bodyPr>
-          <a:lstStyle/>
-          <a:p>
-            <a:pPr algn="l">
-              <a:lnSpc>
-                <a:spcPct val="122000"/>
-              </a:lnSpc>
-              <a:spcAft>
-                <a:spcPts val="0"/>
-              </a:spcAft>
-            </a:pPr>
-            <a:r>
-              <a:rPr sz="930" b="0">
-                <a:solidFill>
-                  <a:srgbClr val="1B2420"/>
-                </a:solidFill>
-                <a:latin typeface="Tahoma"/>
-              </a:rPr>
-              <a:t>ด้านการรับประกันคุณภาพ วางแผนทดสอบการใช้งานจริงกับผู้ใช้ 5–8 คนตาม protocol ที่กำหนดไว้ล่วงหน้า พร้อม checklist ตามหลัก PDPA</a:t>
-            </a:r>
-          </a:p>
-        </p:txBody>
-      </p:sp>
-      <p:sp>
-        <p:nvSpPr>
-          <p:cNvPr id="47" name="TextBox 46"/>
-          <p:cNvSpPr txBox="1"/>
-          <p:nvPr/>
-        </p:nvSpPr>
-        <p:spPr>
-          <a:xfrm>
-            <a:off x="540000" y="7646400"/>
-            <a:ext cx="6480000" cy="251999"/>
-          </a:xfrm>
-          <a:prstGeom prst="rect">
-            <a:avLst/>
-          </a:prstGeom>
-          <a:noFill/>
-        </p:spPr>
-        <p:txBody>
-          <a:bodyPr wrap="square" anchor="t" lIns="0" rIns="0" tIns="0" bIns="0">
-            <a:spAutoFit/>
-          </a:bodyPr>
-          <a:lstStyle/>
-          <a:p>
-            <a:pPr algn="l">
-              <a:lnSpc>
-                <a:spcPct val="115000"/>
-              </a:lnSpc>
-              <a:spcAft>
-                <a:spcPts val="0"/>
-              </a:spcAft>
-            </a:pPr>
-            <a:r>
-              <a:rPr sz="1500" b="1">
-                <a:solidFill>
-                  <a:srgbClr val="0B5C43"/>
-                </a:solidFill>
-                <a:latin typeface="Tahoma"/>
-              </a:rPr>
-              <a:t>Value Proposition</a:t>
-            </a:r>
-          </a:p>
-        </p:txBody>
-      </p:sp>
-      <p:sp>
-        <p:nvSpPr>
-          <p:cNvPr id="48" name="Rounded Rectangle 47"/>
+              <a:t>กระเป๋ารายวันถูกเติมให้ถึง 600 ฿ จากบัญชีรายเดือน</a:t>
+            </a:r>
+          </a:p>
+        </p:txBody>
+      </p:sp>
+      <p:sp>
+        <p:nvSpPr>
+          <p:cNvPr id="46" name="Rounded Rectangle 45"/>
           <p:cNvSpPr/>
           <p:nvPr/>
         </p:nvSpPr>
         <p:spPr>
           <a:xfrm>
-            <a:off x="540000" y="7869600"/>
-            <a:ext cx="3150000" cy="972000"/>
+            <a:off x="540000" y="4136400"/>
+            <a:ext cx="2088000" cy="1404000"/>
           </a:xfrm>
           <a:prstGeom prst="roundRect">
             <a:avLst>
-              <a:gd name="adj" fmla="val 8000"/>
+              <a:gd name="adj" fmla="val 6000"/>
             </a:avLst>
           </a:prstGeom>
           <a:solidFill>
-            <a:srgbClr val="F2F8F5"/>
+            <a:srgbClr val="FAFCFB"/>
           </a:solidFill>
-          <a:ln>
-            <a:noFill/>
+          <a:ln w="9525">
+            <a:solidFill>
+              <a:srgbClr val="DCE8E1"/>
+            </a:solidFill>
           </a:ln>
           <a:effectLst/>
         </p:spPr>
@@ -5191,14 +5099,14 @@
       </p:sp>
       <p:sp>
         <p:nvSpPr>
-          <p:cNvPr id="49" name="TextBox 48"/>
+          <p:cNvPr id="47" name="TextBox 46"/>
           <p:cNvSpPr txBox="1"/>
           <p:nvPr/>
         </p:nvSpPr>
         <p:spPr>
           <a:xfrm>
-            <a:off x="648000" y="7941600"/>
-            <a:ext cx="2934000" cy="180000"/>
+            <a:off x="630000" y="4208400"/>
+            <a:ext cx="1908000" cy="216000"/>
           </a:xfrm>
           <a:prstGeom prst="rect">
             <a:avLst/>
@@ -5222,25 +5130,25 @@
             <a:r>
               <a:rPr sz="1050" b="1">
                 <a:solidFill>
-                  <a:srgbClr val="0B5C43"/>
+                  <a:srgbClr val="1B2420"/>
                 </a:solidFill>
                 <a:latin typeface="Tahoma"/>
               </a:rPr>
-              <a:t>ผู้ใช้</a:t>
-            </a:r>
-          </a:p>
-        </p:txBody>
-      </p:sp>
-      <p:sp>
-        <p:nvSpPr>
-          <p:cNvPr id="50" name="TextBox 49"/>
+              <a:t>Auto-Split ตอนเงินเข้า</a:t>
+            </a:r>
+          </a:p>
+        </p:txBody>
+      </p:sp>
+      <p:sp>
+        <p:nvSpPr>
+          <p:cNvPr id="48" name="TextBox 47"/>
           <p:cNvSpPr txBox="1"/>
           <p:nvPr/>
         </p:nvSpPr>
         <p:spPr>
           <a:xfrm>
-            <a:off x="648000" y="8139600"/>
-            <a:ext cx="2934000" cy="630000"/>
+            <a:off x="630000" y="4406400"/>
+            <a:ext cx="1908000" cy="1044000"/>
           </a:xfrm>
           <a:prstGeom prst="rect">
             <a:avLst/>
@@ -5255,45 +5163,47 @@
           <a:p>
             <a:pPr algn="l">
               <a:lnSpc>
-                <a:spcPct val="122000"/>
+                <a:spcPct val="120000"/>
               </a:lnSpc>
               <a:spcAft>
                 <a:spcPts val="0"/>
               </a:spcAft>
             </a:pPr>
             <a:r>
-              <a:rPr sz="880" b="0">
+              <a:rPr sz="860" b="0">
                 <a:solidFill>
                   <a:srgbClr val="33403A"/>
                 </a:solidFill>
                 <a:latin typeface="Tahoma"/>
               </a:rPr>
-              <a:t>ผู้ใช้ไม่ต้องแบ่งเงินเอง เห็นเงินออมของตัวเองเติบโตขึ้นอย่างเป็นระบบ และมีเวลาคิดทบทวนมากขึ้นก่อนจะใช้เงินก้อนที่ออมไว้ ซึ่งในกรณีที่กำลังจะโอนเงินออมให้มิจฉาชีพโดยไม่ทันคิด ช่วงเวลารอนี้อาจช่วยลดความเสียหายได้บ้าง</a:t>
-            </a:r>
-          </a:p>
-        </p:txBody>
-      </p:sp>
-      <p:sp>
-        <p:nvSpPr>
-          <p:cNvPr id="51" name="Rounded Rectangle 50"/>
+              <a:t>เมื่อเงินเดือนเข้า ระบบถามยืนยันก่อนเสมอ แล้วกันเงินสำหรับบิลไว้ก่อน แบ่งส่วนออมเข้ากระเป๋านิรภัย และเก็บที่เหลือไว้ในบัญชีเงินรายเดือน หากตั้งให้จดจำผู้ส่ง รอบถัดไปทำงานอัตโนมัติทันที ใช้ได้ทั้งพนักงานประจำและฟรีแลนซ์ที่รายได้เข้าไม่ตรงงวด</a:t>
+            </a:r>
+          </a:p>
+        </p:txBody>
+      </p:sp>
+      <p:sp>
+        <p:nvSpPr>
+          <p:cNvPr id="49" name="Rounded Rectangle 48"/>
           <p:cNvSpPr/>
           <p:nvPr/>
         </p:nvSpPr>
         <p:spPr>
           <a:xfrm>
-            <a:off x="3870000" y="7869600"/>
-            <a:ext cx="3150000" cy="972000"/>
+            <a:off x="2736000" y="4136400"/>
+            <a:ext cx="2088000" cy="1404000"/>
           </a:xfrm>
           <a:prstGeom prst="roundRect">
             <a:avLst>
-              <a:gd name="adj" fmla="val 8000"/>
+              <a:gd name="adj" fmla="val 6000"/>
             </a:avLst>
           </a:prstGeom>
           <a:solidFill>
-            <a:srgbClr val="F2F8F5"/>
+            <a:srgbClr val="FAFCFB"/>
           </a:solidFill>
-          <a:ln>
-            <a:noFill/>
+          <a:ln w="9525">
+            <a:solidFill>
+              <a:srgbClr val="DCE8E1"/>
+            </a:solidFill>
           </a:ln>
           <a:effectLst/>
         </p:spPr>
@@ -5321,14 +5231,14 @@
       </p:sp>
       <p:sp>
         <p:nvSpPr>
-          <p:cNvPr id="52" name="TextBox 51"/>
+          <p:cNvPr id="50" name="TextBox 49"/>
           <p:cNvSpPr txBox="1"/>
           <p:nvPr/>
         </p:nvSpPr>
         <p:spPr>
           <a:xfrm>
-            <a:off x="3978000" y="7941600"/>
-            <a:ext cx="2934000" cy="180000"/>
+            <a:off x="2826000" y="4208400"/>
+            <a:ext cx="1908000" cy="216000"/>
           </a:xfrm>
           <a:prstGeom prst="rect">
             <a:avLst/>
@@ -5352,25 +5262,25 @@
             <a:r>
               <a:rPr sz="1050" b="1">
                 <a:solidFill>
-                  <a:srgbClr val="0B5C43"/>
+                  <a:srgbClr val="1B2420"/>
                 </a:solidFill>
                 <a:latin typeface="Tahoma"/>
               </a:rPr>
-              <a:t>K PLUS</a:t>
-            </a:r>
-          </a:p>
-        </p:txBody>
-      </p:sp>
-      <p:sp>
-        <p:nvSpPr>
-          <p:cNvPr id="53" name="TextBox 52"/>
+              <a:t>Daily Auto-Refill</a:t>
+            </a:r>
+          </a:p>
+        </p:txBody>
+      </p:sp>
+      <p:sp>
+        <p:nvSpPr>
+          <p:cNvPr id="51" name="TextBox 50"/>
           <p:cNvSpPr txBox="1"/>
           <p:nvPr/>
         </p:nvSpPr>
         <p:spPr>
           <a:xfrm>
-            <a:off x="3978000" y="8139600"/>
-            <a:ext cx="2934000" cy="630000"/>
+            <a:off x="2826000" y="4406400"/>
+            <a:ext cx="1908000" cy="1044000"/>
           </a:xfrm>
           <a:prstGeom prst="rect">
             <a:avLst/>
@@ -5385,43 +5295,47 @@
           <a:p>
             <a:pPr algn="l">
               <a:lnSpc>
-                <a:spcPct val="122000"/>
+                <a:spcPct val="120000"/>
               </a:lnSpc>
               <a:spcAft>
                 <a:spcPts val="0"/>
               </a:spcAft>
             </a:pPr>
             <a:r>
-              <a:rPr sz="880" b="0">
+              <a:rPr sz="860" b="0">
                 <a:solidFill>
                   <a:srgbClr val="33403A"/>
                 </a:solidFill>
                 <a:latin typeface="Tahoma"/>
               </a:rPr>
-              <a:t>ฟีเจอร์นี้ช่วยเพิ่มความถี่ในการเปิดใช้แอป เปิดโอกาสต่อยอดผลิตภัณฑ์ออมทรัพย์จากพฤติกรรมผู้ใช้จริง และสร้างความแตกต่างที่ชัดเจนจาก Cloud Pocket ของ MAKE by KBank และ Lock Account เดิมของ K PLUS ซึ่งยังไม่มีกลไกปลดล็อกอัตโนมัติในระดับกระเป๋าย่อยแบบนี้</a:t>
-            </a:r>
-          </a:p>
-        </p:txBody>
-      </p:sp>
-      <p:sp>
-        <p:nvSpPr>
-          <p:cNvPr id="54" name="Rectangle 53"/>
+              <a:t>ระบบคำนวณเป้ารายวันจากยอดบัญชีเงินรายเดือนหารด้วยจำนวนวันถึงรอบเงินเข้าถัดไป แล้วเติมกระเป๋ารายวันให้ครบตามเป้าทุกเที่ยงคืน หากใช้เกินเป้า ระบบไม่ปิดกั้น แต่ดึงส่วนที่ขาดจากบัญชีรายเดือนมาเติมทันทีพร้อมแจ้งเตือน</a:t>
+            </a:r>
+          </a:p>
+        </p:txBody>
+      </p:sp>
+      <p:sp>
+        <p:nvSpPr>
+          <p:cNvPr id="52" name="Rounded Rectangle 51"/>
           <p:cNvSpPr/>
           <p:nvPr/>
         </p:nvSpPr>
         <p:spPr>
           <a:xfrm>
-            <a:off x="540000" y="8967599"/>
-            <a:ext cx="6480000" cy="12700"/>
-          </a:xfrm>
-          <a:prstGeom prst="rect">
-            <a:avLst/>
+            <a:off x="4932000" y="4136400"/>
+            <a:ext cx="2088000" cy="1404000"/>
+          </a:xfrm>
+          <a:prstGeom prst="roundRect">
+            <a:avLst>
+              <a:gd name="adj" fmla="val 6000"/>
+            </a:avLst>
           </a:prstGeom>
           <a:solidFill>
-            <a:srgbClr val="DCE8E1"/>
+            <a:srgbClr val="FAFCFB"/>
           </a:solidFill>
-          <a:ln>
-            <a:noFill/>
+          <a:ln w="9525">
+            <a:solidFill>
+              <a:srgbClr val="DCE8E1"/>
+            </a:solidFill>
           </a:ln>
           <a:effectLst/>
         </p:spPr>
@@ -5449,14 +5363,14 @@
       </p:sp>
       <p:sp>
         <p:nvSpPr>
-          <p:cNvPr id="55" name="TextBox 54"/>
+          <p:cNvPr id="53" name="TextBox 52"/>
           <p:cNvSpPr txBox="1"/>
           <p:nvPr/>
         </p:nvSpPr>
         <p:spPr>
           <a:xfrm>
-            <a:off x="540000" y="9021599"/>
-            <a:ext cx="3960000" cy="180000"/>
+            <a:off x="5022000" y="4208400"/>
+            <a:ext cx="1908000" cy="216000"/>
           </a:xfrm>
           <a:prstGeom prst="rect">
             <a:avLst/>
@@ -5478,6 +5392,788 @@
               </a:spcAft>
             </a:pPr>
             <a:r>
+              <a:rPr sz="1050" b="1">
+                <a:solidFill>
+                  <a:srgbClr val="1B2420"/>
+                </a:solidFill>
+                <a:latin typeface="Tahoma"/>
+              </a:rPr>
+              <a:t>กระเป๋านิรภัย (Vault)</a:t>
+            </a:r>
+          </a:p>
+        </p:txBody>
+      </p:sp>
+      <p:sp>
+        <p:nvSpPr>
+          <p:cNvPr id="54" name="TextBox 53"/>
+          <p:cNvSpPr txBox="1"/>
+          <p:nvPr/>
+        </p:nvSpPr>
+        <p:spPr>
+          <a:xfrm>
+            <a:off x="5022000" y="4406400"/>
+            <a:ext cx="1908000" cy="1044000"/>
+          </a:xfrm>
+          <a:prstGeom prst="rect">
+            <a:avLst/>
+          </a:prstGeom>
+          <a:noFill/>
+        </p:spPr>
+        <p:txBody>
+          <a:bodyPr wrap="square" anchor="t" lIns="0" rIns="0" tIns="0" bIns="0">
+            <a:spAutoFit/>
+          </a:bodyPr>
+          <a:lstStyle/>
+          <a:p>
+            <a:pPr algn="l">
+              <a:lnSpc>
+                <a:spcPct val="120000"/>
+              </a:lnSpc>
+              <a:spcAft>
+                <a:spcPts val="0"/>
+              </a:spcAft>
+            </a:pPr>
+            <a:r>
+              <a:rPr sz="860" b="0">
+                <a:solidFill>
+                  <a:srgbClr val="33403A"/>
+                </a:solidFill>
+                <a:latin typeface="Tahoma"/>
+              </a:rPr>
+              <a:t>เงินในกระเป๋านี้ถอนออกไม่ได้ทันที ต้องรอผ่านช่วงเวลาที่กำหนด แล้วระบบปล่อยเงินให้อัตโนมัติ อ้างอิงงานวิจัย commitment device (Ashraf, Karlan &amp; Yin, QJE 2006) ที่พบว่าคนยอมรับกลไกนี้ได้จริงแม้ไม่มีผลตอบแทนพิเศษ</a:t>
+            </a:r>
+          </a:p>
+        </p:txBody>
+      </p:sp>
+      <p:sp>
+        <p:nvSpPr>
+          <p:cNvPr id="55" name="Rounded Rectangle 54"/>
+          <p:cNvSpPr/>
+          <p:nvPr/>
+        </p:nvSpPr>
+        <p:spPr>
+          <a:xfrm>
+            <a:off x="540000" y="5630400"/>
+            <a:ext cx="6480000" cy="468000"/>
+          </a:xfrm>
+          <a:prstGeom prst="roundRect">
+            <a:avLst>
+              <a:gd name="adj" fmla="val 12000"/>
+            </a:avLst>
+          </a:prstGeom>
+          <a:solidFill>
+            <a:srgbClr val="F2F8F5"/>
+          </a:solidFill>
+          <a:ln w="9525">
+            <a:solidFill>
+              <a:srgbClr val="B9D8C7"/>
+            </a:solidFill>
+            <a:prstDash val="dash"/>
+          </a:ln>
+          <a:effectLst/>
+        </p:spPr>
+        <p:style>
+          <a:lnRef idx="1">
+            <a:schemeClr val="accent1"/>
+          </a:lnRef>
+          <a:fillRef idx="3">
+            <a:schemeClr val="accent1"/>
+          </a:fillRef>
+          <a:effectRef idx="2">
+            <a:schemeClr val="accent1"/>
+          </a:effectRef>
+          <a:fontRef idx="minor">
+            <a:schemeClr val="lt1"/>
+          </a:fontRef>
+        </p:style>
+        <p:txBody>
+          <a:bodyPr rtlCol="0" anchor="ctr"/>
+          <a:lstStyle/>
+          <a:p>
+            <a:pPr algn="ctr"/>
+          </a:p>
+        </p:txBody>
+      </p:sp>
+      <p:sp>
+        <p:nvSpPr>
+          <p:cNvPr id="56" name="TextBox 55"/>
+          <p:cNvSpPr txBox="1"/>
+          <p:nvPr/>
+        </p:nvSpPr>
+        <p:spPr>
+          <a:xfrm>
+            <a:off x="648000" y="5684400"/>
+            <a:ext cx="6264000" cy="360000"/>
+          </a:xfrm>
+          <a:prstGeom prst="rect">
+            <a:avLst/>
+          </a:prstGeom>
+          <a:noFill/>
+        </p:spPr>
+        <p:txBody>
+          <a:bodyPr wrap="square" anchor="t" lIns="0" rIns="0" tIns="0" bIns="0">
+            <a:spAutoFit/>
+          </a:bodyPr>
+          <a:lstStyle/>
+          <a:p>
+            <a:pPr algn="l">
+              <a:lnSpc>
+                <a:spcPct val="120000"/>
+              </a:lnSpc>
+              <a:spcAft>
+                <a:spcPts val="0"/>
+              </a:spcAft>
+            </a:pPr>
+            <a:r>
+              <a:rPr sz="860" b="1">
+                <a:solidFill>
+                  <a:srgbClr val="0B5C43"/>
+                </a:solidFill>
+                <a:latin typeface="Tahoma"/>
+              </a:rPr>
+              <a:t>จุดเล็กๆ ที่ใส่ใจ: </a:t>
+            </a:r>
+            <a:r>
+              <a:rPr sz="860" b="0">
+                <a:solidFill>
+                  <a:srgbClr val="33403A"/>
+                </a:solidFill>
+                <a:latin typeface="Tahoma"/>
+              </a:rPr>
+              <a:t>หน้าจอกระเป๋านิรภัยมีต้นไม้ที่โตขึ้นเป็นระยะตามจำนวนรอบที่ออมต่อเนื่อง ไม่ใช่ยอดเงิน คนเงินเดือนน้อยจึงโตได้เท่าคนเงินเดือนมาก และถอนเงินก็ไม่ทำให้ต้นไม้ตาย เป็นแรงจูงใจง่ายๆ ให้อยากกลับมาออมสม่ำเสมอ</a:t>
+            </a:r>
+          </a:p>
+        </p:txBody>
+      </p:sp>
+      <p:sp>
+        <p:nvSpPr>
+          <p:cNvPr id="57" name="TextBox 56"/>
+          <p:cNvSpPr txBox="1"/>
+          <p:nvPr/>
+        </p:nvSpPr>
+        <p:spPr>
+          <a:xfrm>
+            <a:off x="540000" y="6242400"/>
+            <a:ext cx="3150000" cy="251999"/>
+          </a:xfrm>
+          <a:prstGeom prst="rect">
+            <a:avLst/>
+          </a:prstGeom>
+          <a:noFill/>
+        </p:spPr>
+        <p:txBody>
+          <a:bodyPr wrap="square" anchor="t" lIns="0" rIns="0" tIns="0" bIns="0">
+            <a:spAutoFit/>
+          </a:bodyPr>
+          <a:lstStyle/>
+          <a:p>
+            <a:pPr algn="l">
+              <a:lnSpc>
+                <a:spcPct val="115000"/>
+              </a:lnSpc>
+              <a:spcAft>
+                <a:spcPts val="0"/>
+              </a:spcAft>
+            </a:pPr>
+            <a:r>
+              <a:rPr sz="1500" b="1">
+                <a:solidFill>
+                  <a:srgbClr val="0B5C43"/>
+                </a:solidFill>
+                <a:latin typeface="Tahoma"/>
+              </a:rPr>
+              <a:t>Target Users</a:t>
+            </a:r>
+          </a:p>
+        </p:txBody>
+      </p:sp>
+      <p:sp>
+        <p:nvSpPr>
+          <p:cNvPr id="58" name="TextBox 57"/>
+          <p:cNvSpPr txBox="1"/>
+          <p:nvPr/>
+        </p:nvSpPr>
+        <p:spPr>
+          <a:xfrm>
+            <a:off x="540000" y="6465600"/>
+            <a:ext cx="3150000" cy="1440000"/>
+          </a:xfrm>
+          <a:prstGeom prst="rect">
+            <a:avLst/>
+          </a:prstGeom>
+          <a:noFill/>
+        </p:spPr>
+        <p:txBody>
+          <a:bodyPr wrap="square" anchor="t" lIns="0" rIns="0" tIns="0" bIns="0">
+            <a:spAutoFit/>
+          </a:bodyPr>
+          <a:lstStyle/>
+          <a:p>
+            <a:pPr algn="l">
+              <a:lnSpc>
+                <a:spcPct val="128000"/>
+              </a:lnSpc>
+              <a:spcAft>
+                <a:spcPts val="0"/>
+              </a:spcAft>
+            </a:pPr>
+            <a:r>
+              <a:rPr sz="930" b="0">
+                <a:solidFill>
+                  <a:srgbClr val="1B2420"/>
+                </a:solidFill>
+                <a:latin typeface="Tahoma"/>
+              </a:rPr>
+              <a:t>ผู้ใช้ K PLUS อายุ 22–30 ปี กลุ่ม First Jobbers ที่รายได้ปานกลางถึงจำกัด เช่น พนักงานออฟฟิศเงินเดือน 22,500 บาทที่เข้าตรงเวลาทุกเดือน หรือฟรีแลนซ์ที่ลูกค้าโอนเงินไม่ตรงงวด คนกลุ่มนี้มีรายรับแต่จัดสรรเงินเองไม่ทัน โดยเฉพาะกลุ่มที่เช่าบ้านหรือคอนโดในเมืองซึ่งค่าครองชีพสูงเมื่อเทียบกับรายได้</a:t>
+            </a:r>
+          </a:p>
+        </p:txBody>
+      </p:sp>
+      <p:sp>
+        <p:nvSpPr>
+          <p:cNvPr id="59" name="TextBox 58"/>
+          <p:cNvSpPr txBox="1"/>
+          <p:nvPr/>
+        </p:nvSpPr>
+        <p:spPr>
+          <a:xfrm>
+            <a:off x="3870000" y="6242400"/>
+            <a:ext cx="3150000" cy="251999"/>
+          </a:xfrm>
+          <a:prstGeom prst="rect">
+            <a:avLst/>
+          </a:prstGeom>
+          <a:noFill/>
+        </p:spPr>
+        <p:txBody>
+          <a:bodyPr wrap="square" anchor="t" lIns="0" rIns="0" tIns="0" bIns="0">
+            <a:spAutoFit/>
+          </a:bodyPr>
+          <a:lstStyle/>
+          <a:p>
+            <a:pPr algn="l">
+              <a:lnSpc>
+                <a:spcPct val="115000"/>
+              </a:lnSpc>
+              <a:spcAft>
+                <a:spcPts val="0"/>
+              </a:spcAft>
+            </a:pPr>
+            <a:r>
+              <a:rPr sz="1500" b="1">
+                <a:solidFill>
+                  <a:srgbClr val="0B5C43"/>
+                </a:solidFill>
+                <a:latin typeface="Tahoma"/>
+              </a:rPr>
+              <a:t>Track Perspective — Track 1</a:t>
+            </a:r>
+          </a:p>
+        </p:txBody>
+      </p:sp>
+      <p:sp>
+        <p:nvSpPr>
+          <p:cNvPr id="60" name="TextBox 59"/>
+          <p:cNvSpPr txBox="1"/>
+          <p:nvPr/>
+        </p:nvSpPr>
+        <p:spPr>
+          <a:xfrm>
+            <a:off x="3870000" y="6465600"/>
+            <a:ext cx="3150000" cy="540000"/>
+          </a:xfrm>
+          <a:prstGeom prst="rect">
+            <a:avLst/>
+          </a:prstGeom>
+          <a:noFill/>
+        </p:spPr>
+        <p:txBody>
+          <a:bodyPr wrap="square" anchor="t" lIns="0" rIns="0" tIns="0" bIns="0">
+            <a:spAutoFit/>
+          </a:bodyPr>
+          <a:lstStyle/>
+          <a:p>
+            <a:pPr algn="l">
+              <a:lnSpc>
+                <a:spcPct val="122000"/>
+              </a:lnSpc>
+              <a:spcAft>
+                <a:spcPts val="0"/>
+              </a:spcAft>
+            </a:pPr>
+            <a:r>
+              <a:rPr sz="930" b="0">
+                <a:solidFill>
+                  <a:srgbClr val="1B2420"/>
+                </a:solidFill>
+                <a:latin typeface="Tahoma"/>
+              </a:rPr>
+              <a:t>ด้านการพัฒนา แยก rule engine เป็นโมดูลที่ทดสอบง่าย ให้สถานะรอถอนเงินอ้างอิงจากเซิร์ฟเวอร์เท่านั้น และบันทึกทุกรายการผ่าน ledger ที่เขียนทางเดียว</a:t>
+            </a:r>
+          </a:p>
+        </p:txBody>
+      </p:sp>
+      <p:sp>
+        <p:nvSpPr>
+          <p:cNvPr id="61" name="TextBox 60"/>
+          <p:cNvSpPr txBox="1"/>
+          <p:nvPr/>
+        </p:nvSpPr>
+        <p:spPr>
+          <a:xfrm>
+            <a:off x="3870000" y="6976800"/>
+            <a:ext cx="3150000" cy="540000"/>
+          </a:xfrm>
+          <a:prstGeom prst="rect">
+            <a:avLst/>
+          </a:prstGeom>
+          <a:noFill/>
+        </p:spPr>
+        <p:txBody>
+          <a:bodyPr wrap="square" anchor="t" lIns="0" rIns="0" tIns="0" bIns="0">
+            <a:spAutoFit/>
+          </a:bodyPr>
+          <a:lstStyle/>
+          <a:p>
+            <a:pPr algn="l">
+              <a:lnSpc>
+                <a:spcPct val="122000"/>
+              </a:lnSpc>
+              <a:spcAft>
+                <a:spcPts val="0"/>
+              </a:spcAft>
+            </a:pPr>
+            <a:r>
+              <a:rPr sz="930" b="0">
+                <a:solidFill>
+                  <a:srgbClr val="1B2420"/>
+                </a:solidFill>
+                <a:latin typeface="Tahoma"/>
+              </a:rPr>
+              <a:t>ด้านการทดสอบ ใช้ property test สุ่มธุรกรรมกว่าหมื่นรายการยืนยันว่ายอดเงินทุกบัญชีถูกต้องเสมอ ร่วมกับ unit และ integration test ครอบคลุมกรณีย่อยกว่า 50 จุด รวมถึง idempotency และ concurrency</a:t>
+            </a:r>
+          </a:p>
+        </p:txBody>
+      </p:sp>
+      <p:sp>
+        <p:nvSpPr>
+          <p:cNvPr id="62" name="TextBox 61"/>
+          <p:cNvSpPr txBox="1"/>
+          <p:nvPr/>
+        </p:nvSpPr>
+        <p:spPr>
+          <a:xfrm>
+            <a:off x="3870000" y="7488000"/>
+            <a:ext cx="3150000" cy="540000"/>
+          </a:xfrm>
+          <a:prstGeom prst="rect">
+            <a:avLst/>
+          </a:prstGeom>
+          <a:noFill/>
+        </p:spPr>
+        <p:txBody>
+          <a:bodyPr wrap="square" anchor="t" lIns="0" rIns="0" tIns="0" bIns="0">
+            <a:spAutoFit/>
+          </a:bodyPr>
+          <a:lstStyle/>
+          <a:p>
+            <a:pPr algn="l">
+              <a:lnSpc>
+                <a:spcPct val="122000"/>
+              </a:lnSpc>
+              <a:spcAft>
+                <a:spcPts val="0"/>
+              </a:spcAft>
+            </a:pPr>
+            <a:r>
+              <a:rPr sz="930" b="0">
+                <a:solidFill>
+                  <a:srgbClr val="1B2420"/>
+                </a:solidFill>
+                <a:latin typeface="Tahoma"/>
+              </a:rPr>
+              <a:t>ด้านคุณภาพ วางแผนทดสอบกับผู้ใช้จริง 5–8 คนตาม protocol ที่กำหนดล่วงหน้า พร้อม checklist ตามหลัก PDPA</a:t>
+            </a:r>
+          </a:p>
+        </p:txBody>
+      </p:sp>
+      <p:sp>
+        <p:nvSpPr>
+          <p:cNvPr id="63" name="TextBox 62"/>
+          <p:cNvSpPr txBox="1"/>
+          <p:nvPr/>
+        </p:nvSpPr>
+        <p:spPr>
+          <a:xfrm>
+            <a:off x="540000" y="8366400"/>
+            <a:ext cx="6480000" cy="251999"/>
+          </a:xfrm>
+          <a:prstGeom prst="rect">
+            <a:avLst/>
+          </a:prstGeom>
+          <a:noFill/>
+        </p:spPr>
+        <p:txBody>
+          <a:bodyPr wrap="square" anchor="t" lIns="0" rIns="0" tIns="0" bIns="0">
+            <a:spAutoFit/>
+          </a:bodyPr>
+          <a:lstStyle/>
+          <a:p>
+            <a:pPr algn="l">
+              <a:lnSpc>
+                <a:spcPct val="115000"/>
+              </a:lnSpc>
+              <a:spcAft>
+                <a:spcPts val="0"/>
+              </a:spcAft>
+            </a:pPr>
+            <a:r>
+              <a:rPr sz="1500" b="1">
+                <a:solidFill>
+                  <a:srgbClr val="0B5C43"/>
+                </a:solidFill>
+                <a:latin typeface="Tahoma"/>
+              </a:rPr>
+              <a:t>Value Proposition</a:t>
+            </a:r>
+          </a:p>
+        </p:txBody>
+      </p:sp>
+      <p:sp>
+        <p:nvSpPr>
+          <p:cNvPr id="64" name="Rounded Rectangle 63"/>
+          <p:cNvSpPr/>
+          <p:nvPr/>
+        </p:nvSpPr>
+        <p:spPr>
+          <a:xfrm>
+            <a:off x="540000" y="8589600"/>
+            <a:ext cx="3150000" cy="972000"/>
+          </a:xfrm>
+          <a:prstGeom prst="roundRect">
+            <a:avLst>
+              <a:gd name="adj" fmla="val 8000"/>
+            </a:avLst>
+          </a:prstGeom>
+          <a:solidFill>
+            <a:srgbClr val="F2F8F5"/>
+          </a:solidFill>
+          <a:ln>
+            <a:noFill/>
+          </a:ln>
+          <a:effectLst/>
+        </p:spPr>
+        <p:style>
+          <a:lnRef idx="1">
+            <a:schemeClr val="accent1"/>
+          </a:lnRef>
+          <a:fillRef idx="3">
+            <a:schemeClr val="accent1"/>
+          </a:fillRef>
+          <a:effectRef idx="2">
+            <a:schemeClr val="accent1"/>
+          </a:effectRef>
+          <a:fontRef idx="minor">
+            <a:schemeClr val="lt1"/>
+          </a:fontRef>
+        </p:style>
+        <p:txBody>
+          <a:bodyPr rtlCol="0" anchor="ctr"/>
+          <a:lstStyle/>
+          <a:p>
+            <a:pPr algn="ctr"/>
+          </a:p>
+        </p:txBody>
+      </p:sp>
+      <p:sp>
+        <p:nvSpPr>
+          <p:cNvPr id="65" name="TextBox 64"/>
+          <p:cNvSpPr txBox="1"/>
+          <p:nvPr/>
+        </p:nvSpPr>
+        <p:spPr>
+          <a:xfrm>
+            <a:off x="648000" y="8661600"/>
+            <a:ext cx="2934000" cy="180000"/>
+          </a:xfrm>
+          <a:prstGeom prst="rect">
+            <a:avLst/>
+          </a:prstGeom>
+          <a:noFill/>
+        </p:spPr>
+        <p:txBody>
+          <a:bodyPr wrap="square" anchor="t" lIns="0" rIns="0" tIns="0" bIns="0">
+            <a:spAutoFit/>
+          </a:bodyPr>
+          <a:lstStyle/>
+          <a:p>
+            <a:pPr algn="l">
+              <a:lnSpc>
+                <a:spcPct val="115000"/>
+              </a:lnSpc>
+              <a:spcAft>
+                <a:spcPts val="0"/>
+              </a:spcAft>
+            </a:pPr>
+            <a:r>
+              <a:rPr sz="1050" b="1">
+                <a:solidFill>
+                  <a:srgbClr val="0B5C43"/>
+                </a:solidFill>
+                <a:latin typeface="Tahoma"/>
+              </a:rPr>
+              <a:t>ผู้ใช้</a:t>
+            </a:r>
+          </a:p>
+        </p:txBody>
+      </p:sp>
+      <p:sp>
+        <p:nvSpPr>
+          <p:cNvPr id="66" name="TextBox 65"/>
+          <p:cNvSpPr txBox="1"/>
+          <p:nvPr/>
+        </p:nvSpPr>
+        <p:spPr>
+          <a:xfrm>
+            <a:off x="648000" y="8859600"/>
+            <a:ext cx="2934000" cy="630000"/>
+          </a:xfrm>
+          <a:prstGeom prst="rect">
+            <a:avLst/>
+          </a:prstGeom>
+          <a:noFill/>
+        </p:spPr>
+        <p:txBody>
+          <a:bodyPr wrap="square" anchor="t" lIns="0" rIns="0" tIns="0" bIns="0">
+            <a:spAutoFit/>
+          </a:bodyPr>
+          <a:lstStyle/>
+          <a:p>
+            <a:pPr algn="l">
+              <a:lnSpc>
+                <a:spcPct val="122000"/>
+              </a:lnSpc>
+              <a:spcAft>
+                <a:spcPts val="0"/>
+              </a:spcAft>
+            </a:pPr>
+            <a:r>
+              <a:rPr sz="880" b="0">
+                <a:solidFill>
+                  <a:srgbClr val="33403A"/>
+                </a:solidFill>
+                <a:latin typeface="Tahoma"/>
+              </a:rPr>
+              <a:t>ผู้ใช้ไม่ต้องแบ่งเงินเอง เห็นเงินออมของตัวเองเติบโตขึ้นอย่างเป็นระบบ และมีเวลาคิดทบทวนมากขึ้นก่อนจะใช้เงินก้อนที่ออมไว้ ซึ่งในกรณีที่กำลังจะโอนเงินออมให้มิจฉาชีพโดยไม่ทันคิด ช่วงเวลารอนี้อาจช่วยลดความเสียหายได้บ้าง</a:t>
+            </a:r>
+          </a:p>
+        </p:txBody>
+      </p:sp>
+      <p:sp>
+        <p:nvSpPr>
+          <p:cNvPr id="67" name="Rounded Rectangle 66"/>
+          <p:cNvSpPr/>
+          <p:nvPr/>
+        </p:nvSpPr>
+        <p:spPr>
+          <a:xfrm>
+            <a:off x="3870000" y="8589600"/>
+            <a:ext cx="3150000" cy="972000"/>
+          </a:xfrm>
+          <a:prstGeom prst="roundRect">
+            <a:avLst>
+              <a:gd name="adj" fmla="val 8000"/>
+            </a:avLst>
+          </a:prstGeom>
+          <a:solidFill>
+            <a:srgbClr val="F2F8F5"/>
+          </a:solidFill>
+          <a:ln>
+            <a:noFill/>
+          </a:ln>
+          <a:effectLst/>
+        </p:spPr>
+        <p:style>
+          <a:lnRef idx="1">
+            <a:schemeClr val="accent1"/>
+          </a:lnRef>
+          <a:fillRef idx="3">
+            <a:schemeClr val="accent1"/>
+          </a:fillRef>
+          <a:effectRef idx="2">
+            <a:schemeClr val="accent1"/>
+          </a:effectRef>
+          <a:fontRef idx="minor">
+            <a:schemeClr val="lt1"/>
+          </a:fontRef>
+        </p:style>
+        <p:txBody>
+          <a:bodyPr rtlCol="0" anchor="ctr"/>
+          <a:lstStyle/>
+          <a:p>
+            <a:pPr algn="ctr"/>
+          </a:p>
+        </p:txBody>
+      </p:sp>
+      <p:sp>
+        <p:nvSpPr>
+          <p:cNvPr id="68" name="TextBox 67"/>
+          <p:cNvSpPr txBox="1"/>
+          <p:nvPr/>
+        </p:nvSpPr>
+        <p:spPr>
+          <a:xfrm>
+            <a:off x="3978000" y="8661600"/>
+            <a:ext cx="2934000" cy="180000"/>
+          </a:xfrm>
+          <a:prstGeom prst="rect">
+            <a:avLst/>
+          </a:prstGeom>
+          <a:noFill/>
+        </p:spPr>
+        <p:txBody>
+          <a:bodyPr wrap="square" anchor="t" lIns="0" rIns="0" tIns="0" bIns="0">
+            <a:spAutoFit/>
+          </a:bodyPr>
+          <a:lstStyle/>
+          <a:p>
+            <a:pPr algn="l">
+              <a:lnSpc>
+                <a:spcPct val="115000"/>
+              </a:lnSpc>
+              <a:spcAft>
+                <a:spcPts val="0"/>
+              </a:spcAft>
+            </a:pPr>
+            <a:r>
+              <a:rPr sz="1050" b="1">
+                <a:solidFill>
+                  <a:srgbClr val="0B5C43"/>
+                </a:solidFill>
+                <a:latin typeface="Tahoma"/>
+              </a:rPr>
+              <a:t>K PLUS</a:t>
+            </a:r>
+          </a:p>
+        </p:txBody>
+      </p:sp>
+      <p:sp>
+        <p:nvSpPr>
+          <p:cNvPr id="69" name="TextBox 68"/>
+          <p:cNvSpPr txBox="1"/>
+          <p:nvPr/>
+        </p:nvSpPr>
+        <p:spPr>
+          <a:xfrm>
+            <a:off x="3978000" y="8859600"/>
+            <a:ext cx="2934000" cy="630000"/>
+          </a:xfrm>
+          <a:prstGeom prst="rect">
+            <a:avLst/>
+          </a:prstGeom>
+          <a:noFill/>
+        </p:spPr>
+        <p:txBody>
+          <a:bodyPr wrap="square" anchor="t" lIns="0" rIns="0" tIns="0" bIns="0">
+            <a:spAutoFit/>
+          </a:bodyPr>
+          <a:lstStyle/>
+          <a:p>
+            <a:pPr algn="l">
+              <a:lnSpc>
+                <a:spcPct val="122000"/>
+              </a:lnSpc>
+              <a:spcAft>
+                <a:spcPts val="0"/>
+              </a:spcAft>
+            </a:pPr>
+            <a:r>
+              <a:rPr sz="880" b="0">
+                <a:solidFill>
+                  <a:srgbClr val="33403A"/>
+                </a:solidFill>
+                <a:latin typeface="Tahoma"/>
+              </a:rPr>
+              <a:t>ฟีเจอร์นี้ช่วยเพิ่มความถี่ในการเปิดใช้แอป เปิดโอกาสต่อยอดผลิตภัณฑ์ออมทรัพย์จากพฤติกรรมผู้ใช้จริง และสร้างความแตกต่างที่ชัดเจนจาก Cloud Pocket ของ MAKE by KBank และ Lock Account เดิมของ K PLUS ซึ่งยังไม่มีกลไกปลดล็อกอัตโนมัติในระดับกระเป๋าย่อยแบบนี้</a:t>
+            </a:r>
+          </a:p>
+        </p:txBody>
+      </p:sp>
+      <p:sp>
+        <p:nvSpPr>
+          <p:cNvPr id="70" name="Rectangle 69"/>
+          <p:cNvSpPr/>
+          <p:nvPr/>
+        </p:nvSpPr>
+        <p:spPr>
+          <a:xfrm>
+            <a:off x="540000" y="9687599"/>
+            <a:ext cx="6480000" cy="12700"/>
+          </a:xfrm>
+          <a:prstGeom prst="rect">
+            <a:avLst/>
+          </a:prstGeom>
+          <a:solidFill>
+            <a:srgbClr val="DCE8E1"/>
+          </a:solidFill>
+          <a:ln>
+            <a:noFill/>
+          </a:ln>
+          <a:effectLst/>
+        </p:spPr>
+        <p:style>
+          <a:lnRef idx="1">
+            <a:schemeClr val="accent1"/>
+          </a:lnRef>
+          <a:fillRef idx="3">
+            <a:schemeClr val="accent1"/>
+          </a:fillRef>
+          <a:effectRef idx="2">
+            <a:schemeClr val="accent1"/>
+          </a:effectRef>
+          <a:fontRef idx="minor">
+            <a:schemeClr val="lt1"/>
+          </a:fontRef>
+        </p:style>
+        <p:txBody>
+          <a:bodyPr rtlCol="0" anchor="ctr"/>
+          <a:lstStyle/>
+          <a:p>
+            <a:pPr algn="ctr"/>
+          </a:p>
+        </p:txBody>
+      </p:sp>
+      <p:sp>
+        <p:nvSpPr>
+          <p:cNvPr id="71" name="TextBox 70"/>
+          <p:cNvSpPr txBox="1"/>
+          <p:nvPr/>
+        </p:nvSpPr>
+        <p:spPr>
+          <a:xfrm>
+            <a:off x="540000" y="9741599"/>
+            <a:ext cx="3960000" cy="180000"/>
+          </a:xfrm>
+          <a:prstGeom prst="rect">
+            <a:avLst/>
+          </a:prstGeom>
+          <a:noFill/>
+        </p:spPr>
+        <p:txBody>
+          <a:bodyPr wrap="square" anchor="t" lIns="0" rIns="0" tIns="0" bIns="0">
+            <a:spAutoFit/>
+          </a:bodyPr>
+          <a:lstStyle/>
+          <a:p>
+            <a:pPr algn="l">
+              <a:lnSpc>
+                <a:spcPct val="115000"/>
+              </a:lnSpc>
+              <a:spcAft>
+                <a:spcPts val="0"/>
+              </a:spcAft>
+            </a:pPr>
+            <a:r>
               <a:rPr sz="760" b="0">
                 <a:solidFill>
                   <a:srgbClr val="5A6A5F"/>
@@ -5491,13 +6187,13 @@
       </p:sp>
       <p:sp>
         <p:nvSpPr>
-          <p:cNvPr id="56" name="TextBox 55"/>
+          <p:cNvPr id="72" name="TextBox 71"/>
           <p:cNvSpPr txBox="1"/>
           <p:nvPr/>
         </p:nvSpPr>
         <p:spPr>
           <a:xfrm>
-            <a:off x="4860000" y="9021599"/>
+            <a:off x="4860000" y="9741599"/>
             <a:ext cx="2160000" cy="180000"/>
           </a:xfrm>
           <a:prstGeom prst="rect">
@@ -5533,13 +6229,13 @@
       </p:sp>
       <p:sp>
         <p:nvSpPr>
-          <p:cNvPr id="57" name="Rectangle 56"/>
+          <p:cNvPr id="73" name="Rectangle 72"/>
           <p:cNvSpPr/>
           <p:nvPr/>
         </p:nvSpPr>
         <p:spPr>
           <a:xfrm>
-            <a:off x="0" y="9219599"/>
+            <a:off x="0" y="9939599"/>
             <a:ext cx="7560000" cy="792000"/>
           </a:xfrm>
           <a:prstGeom prst="rect">
@@ -5585,13 +6281,13 @@
       </p:sp>
       <p:sp>
         <p:nvSpPr>
-          <p:cNvPr id="58" name="TextBox 57"/>
+          <p:cNvPr id="74" name="TextBox 73"/>
           <p:cNvSpPr txBox="1"/>
           <p:nvPr/>
         </p:nvSpPr>
         <p:spPr>
           <a:xfrm>
-            <a:off x="360000" y="9298799"/>
+            <a:off x="360000" y="10018799"/>
             <a:ext cx="6840000" cy="216000"/>
           </a:xfrm>
           <a:prstGeom prst="rect">
@@ -5627,13 +6323,13 @@
       </p:sp>
       <p:sp>
         <p:nvSpPr>
-          <p:cNvPr id="59" name="Rounded Rectangle 58"/>
+          <p:cNvPr id="75" name="Rounded Rectangle 74"/>
           <p:cNvSpPr/>
           <p:nvPr/>
         </p:nvSpPr>
         <p:spPr>
           <a:xfrm>
-            <a:off x="810000" y="9525599"/>
+            <a:off x="810000" y="10245599"/>
             <a:ext cx="5940000" cy="306000"/>
           </a:xfrm>
           <a:prstGeom prst="roundRect">
@@ -5675,13 +6371,13 @@
       </p:sp>
       <p:sp>
         <p:nvSpPr>
-          <p:cNvPr id="60" name="TextBox 59"/>
+          <p:cNvPr id="76" name="TextBox 75"/>
           <p:cNvSpPr txBox="1"/>
           <p:nvPr/>
         </p:nvSpPr>
         <p:spPr>
           <a:xfrm>
-            <a:off x="810000" y="9525599"/>
+            <a:off x="810000" y="10245599"/>
             <a:ext cx="5940000" cy="306000"/>
           </a:xfrm>
           <a:prstGeom prst="rect">
